--- a/Lecture Slides/23 - Networking - Socket Functions.pptx
+++ b/Lecture Slides/23 - Networking - Socket Functions.pptx
@@ -966,6 +966,229 @@
               </a:spcAft>
               <a:buNone/>
             </a:pPr>
+            <a:endParaRPr lang="en-US" dirty="0"/>
+          </a:p>
+          <a:p>
+            <a:pPr marL="0" lvl="0" indent="0" algn="l" rtl="0">
+              <a:spcBef>
+                <a:spcPts val="0"/>
+              </a:spcBef>
+              <a:spcAft>
+                <a:spcPts val="0"/>
+              </a:spcAft>
+              <a:buNone/>
+            </a:pPr>
+            <a:endParaRPr lang="en-US" dirty="0"/>
+          </a:p>
+          <a:p>
+            <a:pPr marL="0" lvl="0" indent="0" algn="l" rtl="0">
+              <a:spcBef>
+                <a:spcPts val="0"/>
+              </a:spcBef>
+              <a:spcAft>
+                <a:spcPts val="0"/>
+              </a:spcAft>
+              <a:buNone/>
+            </a:pPr>
+            <a:r>
+              <a:rPr lang="en-US" dirty="0"/>
+              <a:t>---</a:t>
+            </a:r>
+          </a:p>
+          <a:p>
+            <a:pPr marL="0" lvl="0" indent="0" algn="l" rtl="0">
+              <a:spcBef>
+                <a:spcPts val="0"/>
+              </a:spcBef>
+              <a:spcAft>
+                <a:spcPts val="0"/>
+              </a:spcAft>
+              <a:buNone/>
+            </a:pPr>
+            <a:r>
+              <a:rPr lang="en-US" i="1" u="sng" dirty="0"/>
+              <a:t>For Reference:</a:t>
+            </a:r>
+          </a:p>
+          <a:p>
+            <a:pPr marL="0" lvl="0" indent="0" algn="l" rtl="0">
+              <a:spcBef>
+                <a:spcPts val="0"/>
+              </a:spcBef>
+              <a:spcAft>
+                <a:spcPts val="0"/>
+              </a:spcAft>
+              <a:buNone/>
+            </a:pPr>
+            <a:r>
+              <a:rPr lang="en-US" sz="1100" b="0" i="0" u="none" strike="noStrike" cap="none" dirty="0">
+                <a:solidFill>
+                  <a:srgbClr val="000000"/>
+                </a:solidFill>
+                <a:effectLst/>
+                <a:latin typeface="Arial"/>
+                <a:ea typeface="Arial"/>
+                <a:cs typeface="Arial"/>
+                <a:sym typeface="Arial"/>
+              </a:rPr>
+              <a:t>The </a:t>
+            </a:r>
+            <a:r>
+              <a:rPr lang="en-US" sz="1100" b="1" i="0" u="none" strike="noStrike" cap="none" dirty="0">
+                <a:solidFill>
+                  <a:srgbClr val="000000"/>
+                </a:solidFill>
+                <a:effectLst/>
+                <a:latin typeface="Arial"/>
+                <a:ea typeface="Arial"/>
+                <a:cs typeface="Arial"/>
+                <a:sym typeface="Arial"/>
+              </a:rPr>
+              <a:t>Internet Control Message Protocol </a:t>
+            </a:r>
+            <a:r>
+              <a:rPr lang="en-US" sz="1100" b="0" i="0" u="none" strike="noStrike" cap="none" dirty="0">
+                <a:solidFill>
+                  <a:srgbClr val="000000"/>
+                </a:solidFill>
+                <a:effectLst/>
+                <a:latin typeface="Arial"/>
+                <a:ea typeface="Arial"/>
+                <a:cs typeface="Arial"/>
+                <a:sym typeface="Arial"/>
+              </a:rPr>
+              <a:t>(ICMP) </a:t>
+            </a:r>
+          </a:p>
+          <a:p>
+            <a:pPr marL="0" lvl="0" indent="0" algn="l" rtl="0">
+              <a:spcBef>
+                <a:spcPts val="0"/>
+              </a:spcBef>
+              <a:spcAft>
+                <a:spcPts val="0"/>
+              </a:spcAft>
+              <a:buNone/>
+            </a:pPr>
+            <a:r>
+              <a:rPr lang="en-US" sz="1100" b="0" i="0" u="none" strike="noStrike" cap="none" dirty="0">
+                <a:solidFill>
+                  <a:srgbClr val="000000"/>
+                </a:solidFill>
+                <a:effectLst/>
+                <a:latin typeface="Arial"/>
+                <a:ea typeface="Arial"/>
+                <a:cs typeface="Arial"/>
+                <a:sym typeface="Arial"/>
+              </a:rPr>
+              <a:t>is </a:t>
+            </a:r>
+            <a:r>
+              <a:rPr lang="en-US" dirty="0"/>
+              <a:t>a network layer protocol used by devices (like routers) </a:t>
+            </a:r>
+          </a:p>
+          <a:p>
+            <a:pPr marL="0" lvl="0" indent="0" algn="l" rtl="0">
+              <a:spcBef>
+                <a:spcPts val="0"/>
+              </a:spcBef>
+              <a:spcAft>
+                <a:spcPts val="0"/>
+              </a:spcAft>
+              <a:buNone/>
+            </a:pPr>
+            <a:r>
+              <a:rPr lang="en-US" dirty="0"/>
+              <a:t>to send error messages and operational information, </a:t>
+            </a:r>
+          </a:p>
+          <a:p>
+            <a:pPr marL="0" lvl="0" indent="0" algn="l" rtl="0">
+              <a:spcBef>
+                <a:spcPts val="0"/>
+              </a:spcBef>
+              <a:spcAft>
+                <a:spcPts val="0"/>
+              </a:spcAft>
+              <a:buNone/>
+            </a:pPr>
+            <a:r>
+              <a:rPr lang="en-US" dirty="0"/>
+              <a:t>such as unreachable hosts or time-to-live (TTL) expiration</a:t>
+            </a:r>
+            <a:r>
+              <a:rPr lang="en-US" sz="1100" b="0" i="0" u="none" strike="noStrike" cap="none" dirty="0">
+                <a:solidFill>
+                  <a:srgbClr val="000000"/>
+                </a:solidFill>
+                <a:effectLst/>
+                <a:latin typeface="Arial"/>
+                <a:ea typeface="Arial"/>
+                <a:cs typeface="Arial"/>
+                <a:sym typeface="Arial"/>
+              </a:rPr>
+              <a:t>. </a:t>
+            </a:r>
+          </a:p>
+          <a:p>
+            <a:pPr marL="0" lvl="0" indent="0" algn="l" rtl="0">
+              <a:spcBef>
+                <a:spcPts val="0"/>
+              </a:spcBef>
+              <a:spcAft>
+                <a:spcPts val="0"/>
+              </a:spcAft>
+              <a:buNone/>
+            </a:pPr>
+            <a:r>
+              <a:rPr lang="en-US" sz="1100" b="0" i="0" u="none" strike="noStrike" cap="none" dirty="0">
+                <a:solidFill>
+                  <a:srgbClr val="000000"/>
+                </a:solidFill>
+                <a:effectLst/>
+                <a:latin typeface="Arial"/>
+                <a:ea typeface="Arial"/>
+                <a:cs typeface="Arial"/>
+                <a:sym typeface="Arial"/>
+              </a:rPr>
+              <a:t>It is essential for network diagnostics (ping/traceroute) and works alongside IP, </a:t>
+            </a:r>
+          </a:p>
+          <a:p>
+            <a:pPr marL="0" lvl="0" indent="0" algn="l" rtl="0">
+              <a:spcBef>
+                <a:spcPts val="0"/>
+              </a:spcBef>
+              <a:spcAft>
+                <a:spcPts val="0"/>
+              </a:spcAft>
+              <a:buNone/>
+            </a:pPr>
+            <a:r>
+              <a:rPr lang="en-US" sz="1100" b="0" i="0" u="none" strike="noStrike" cap="none" dirty="0">
+                <a:solidFill>
+                  <a:srgbClr val="000000"/>
+                </a:solidFill>
+                <a:effectLst/>
+                <a:latin typeface="Arial"/>
+                <a:ea typeface="Arial"/>
+                <a:cs typeface="Arial"/>
+                <a:sym typeface="Arial"/>
+              </a:rPr>
+              <a:t>though it does not guarantee reliable delivery.</a:t>
+            </a:r>
+          </a:p>
+          <a:p>
+            <a:pPr marL="0" lvl="0" indent="0" algn="l" rtl="0">
+              <a:spcBef>
+                <a:spcPts val="0"/>
+              </a:spcBef>
+              <a:spcAft>
+                <a:spcPts val="0"/>
+              </a:spcAft>
+              <a:buNone/>
+            </a:pPr>
             <a:endParaRPr dirty="0"/>
           </a:p>
         </p:txBody>
@@ -7278,6 +7501,397 @@
               </a:spcAft>
               <a:buNone/>
             </a:pPr>
+            <a:endParaRPr lang="en-US" sz="1100" b="0" i="0" u="none" strike="noStrike" cap="none" dirty="0">
+              <a:solidFill>
+                <a:srgbClr val="000000"/>
+              </a:solidFill>
+              <a:latin typeface="Arial"/>
+              <a:cs typeface="Arial"/>
+              <a:sym typeface="Arial"/>
+            </a:endParaRPr>
+          </a:p>
+          <a:p>
+            <a:pPr marL="0" lvl="0" indent="0" algn="l" rtl="0">
+              <a:spcBef>
+                <a:spcPts val="0"/>
+              </a:spcBef>
+              <a:spcAft>
+                <a:spcPts val="0"/>
+              </a:spcAft>
+              <a:buNone/>
+            </a:pPr>
+            <a:endParaRPr lang="en-US" sz="1100" b="0" i="0" u="none" strike="noStrike" cap="none" dirty="0">
+              <a:solidFill>
+                <a:srgbClr val="000000"/>
+              </a:solidFill>
+              <a:latin typeface="Arial"/>
+              <a:cs typeface="Arial"/>
+              <a:sym typeface="Arial"/>
+            </a:endParaRPr>
+          </a:p>
+          <a:p>
+            <a:pPr marL="0" lvl="0" indent="0" algn="l" rtl="0">
+              <a:spcBef>
+                <a:spcPts val="0"/>
+              </a:spcBef>
+              <a:spcAft>
+                <a:spcPts val="0"/>
+              </a:spcAft>
+              <a:buNone/>
+            </a:pPr>
+            <a:r>
+              <a:rPr lang="en-US" sz="1100" b="0" i="0" u="none" strike="noStrike" cap="none" dirty="0">
+                <a:solidFill>
+                  <a:srgbClr val="000000"/>
+                </a:solidFill>
+                <a:latin typeface="Arial"/>
+                <a:cs typeface="Arial"/>
+                <a:sym typeface="Arial"/>
+              </a:rPr>
+              <a:t>---</a:t>
+            </a:r>
+          </a:p>
+          <a:p>
+            <a:pPr marL="0" lvl="0" indent="0" algn="l" rtl="0">
+              <a:spcBef>
+                <a:spcPts val="0"/>
+              </a:spcBef>
+              <a:spcAft>
+                <a:spcPts val="0"/>
+              </a:spcAft>
+              <a:buNone/>
+            </a:pPr>
+            <a:r>
+              <a:rPr lang="en-US" sz="1100" b="0" i="1" u="sng" strike="noStrike" cap="none" dirty="0">
+                <a:solidFill>
+                  <a:srgbClr val="000000"/>
+                </a:solidFill>
+                <a:latin typeface="Arial"/>
+                <a:cs typeface="Arial"/>
+                <a:sym typeface="Arial"/>
+              </a:rPr>
+              <a:t>For reference:</a:t>
+            </a:r>
+          </a:p>
+          <a:p>
+            <a:pPr marL="0" lvl="0" indent="0" algn="l" rtl="0">
+              <a:spcBef>
+                <a:spcPts val="0"/>
+              </a:spcBef>
+              <a:spcAft>
+                <a:spcPts val="0"/>
+              </a:spcAft>
+              <a:buNone/>
+            </a:pPr>
+            <a:endParaRPr lang="en-US" sz="1100" b="0" i="0" u="none" strike="noStrike" cap="none" dirty="0">
+              <a:solidFill>
+                <a:srgbClr val="000000"/>
+              </a:solidFill>
+              <a:latin typeface="Arial"/>
+              <a:cs typeface="Arial"/>
+              <a:sym typeface="Arial"/>
+            </a:endParaRPr>
+          </a:p>
+          <a:p>
+            <a:pPr marL="0" lvl="0" indent="0" algn="l" rtl="0">
+              <a:spcBef>
+                <a:spcPts val="0"/>
+              </a:spcBef>
+              <a:spcAft>
+                <a:spcPts val="0"/>
+              </a:spcAft>
+              <a:buNone/>
+            </a:pPr>
+            <a:r>
+              <a:rPr lang="en-US" dirty="0"/>
+              <a:t>In network programming, </a:t>
+            </a:r>
+            <a:r>
+              <a:rPr lang="en-US" sz="1100" b="0" i="0" u="none" strike="noStrike" cap="none" dirty="0">
+                <a:solidFill>
+                  <a:srgbClr val="000000"/>
+                </a:solidFill>
+                <a:latin typeface="Arial"/>
+                <a:ea typeface="Arial"/>
+                <a:cs typeface="Arial"/>
+                <a:sym typeface="Arial"/>
+              </a:rPr>
+              <a:t>MSG_NOSIGNAL</a:t>
+            </a:r>
+            <a:r>
+              <a:rPr lang="en-US" dirty="0"/>
+              <a:t> is a flag used with the </a:t>
+            </a:r>
+            <a:r>
+              <a:rPr lang="en-US" sz="1100" b="0" i="0" u="none" strike="noStrike" cap="none" dirty="0">
+                <a:solidFill>
+                  <a:srgbClr val="000000"/>
+                </a:solidFill>
+                <a:latin typeface="Arial"/>
+                <a:ea typeface="Arial"/>
+                <a:cs typeface="Arial"/>
+                <a:sym typeface="Arial"/>
+              </a:rPr>
+              <a:t>send()</a:t>
+            </a:r>
+            <a:r>
+              <a:rPr lang="en-US" dirty="0"/>
+              <a:t> system call to handle one of the more annoying default behaviors in Unix-like systems: the </a:t>
+            </a:r>
+            <a:r>
+              <a:rPr lang="en-US" b="1" dirty="0"/>
+              <a:t>SIGPIPE</a:t>
+            </a:r>
+            <a:r>
+              <a:rPr lang="en-US" dirty="0"/>
+              <a:t> signal.</a:t>
+            </a:r>
+          </a:p>
+          <a:p>
+            <a:pPr marL="0" lvl="0" indent="0" algn="l" rtl="0">
+              <a:spcBef>
+                <a:spcPts val="0"/>
+              </a:spcBef>
+              <a:spcAft>
+                <a:spcPts val="0"/>
+              </a:spcAft>
+              <a:buNone/>
+            </a:pPr>
+            <a:endParaRPr lang="en-US" b="1" dirty="0"/>
+          </a:p>
+          <a:p>
+            <a:pPr marL="0" lvl="0" indent="0" algn="l" rtl="0">
+              <a:spcBef>
+                <a:spcPts val="0"/>
+              </a:spcBef>
+              <a:spcAft>
+                <a:spcPts val="0"/>
+              </a:spcAft>
+              <a:buNone/>
+            </a:pPr>
+            <a:r>
+              <a:rPr lang="en-US" b="1" dirty="0"/>
+              <a:t>The Problem: Broken Pipes</a:t>
+            </a:r>
+          </a:p>
+          <a:p>
+            <a:pPr marL="0" lvl="0" indent="0" algn="l" rtl="0">
+              <a:spcBef>
+                <a:spcPts val="0"/>
+              </a:spcBef>
+              <a:spcAft>
+                <a:spcPts val="0"/>
+              </a:spcAft>
+              <a:buNone/>
+            </a:pPr>
+            <a:r>
+              <a:rPr lang="en-US" dirty="0"/>
+              <a:t>By default, if you attempt to write data to a socket that has been closed by the remote peer (a "broken pipe"), </a:t>
+            </a:r>
+          </a:p>
+          <a:p>
+            <a:pPr marL="0" lvl="0" indent="0" algn="l" rtl="0">
+              <a:spcBef>
+                <a:spcPts val="0"/>
+              </a:spcBef>
+              <a:spcAft>
+                <a:spcPts val="0"/>
+              </a:spcAft>
+              <a:buNone/>
+            </a:pPr>
+            <a:r>
+              <a:rPr lang="en-US" dirty="0"/>
+              <a:t>the kernel doesn't just return an error. Instead, it sends a </a:t>
+            </a:r>
+            <a:r>
+              <a:rPr lang="en-US" sz="1100" b="0" i="0" u="none" strike="noStrike" cap="none" dirty="0">
+                <a:solidFill>
+                  <a:srgbClr val="000000"/>
+                </a:solidFill>
+                <a:latin typeface="Arial"/>
+                <a:ea typeface="Arial"/>
+                <a:cs typeface="Arial"/>
+                <a:sym typeface="Arial"/>
+              </a:rPr>
+              <a:t>SIGPIPE</a:t>
+            </a:r>
+            <a:r>
+              <a:rPr lang="en-US" dirty="0"/>
+              <a:t> signal to your process.</a:t>
+            </a:r>
+          </a:p>
+          <a:p>
+            <a:pPr marL="171450" lvl="0" indent="-171450" algn="l" rtl="0">
+              <a:spcBef>
+                <a:spcPts val="0"/>
+              </a:spcBef>
+              <a:spcAft>
+                <a:spcPts val="0"/>
+              </a:spcAft>
+            </a:pPr>
+            <a:r>
+              <a:rPr lang="en-US" b="1" dirty="0"/>
+              <a:t>The Default Result:</a:t>
+            </a:r>
+            <a:r>
+              <a:rPr lang="en-US" dirty="0"/>
+              <a:t> If you haven't explicitly handled or ignored this signal, your application will </a:t>
+            </a:r>
+            <a:r>
+              <a:rPr lang="en-US" b="1" dirty="0"/>
+              <a:t>immediately terminate</a:t>
+            </a:r>
+            <a:r>
+              <a:rPr lang="en-US" dirty="0"/>
+              <a:t>.</a:t>
+            </a:r>
+          </a:p>
+          <a:p>
+            <a:pPr marL="171450" lvl="0" indent="-171450" algn="l" rtl="0">
+              <a:spcBef>
+                <a:spcPts val="0"/>
+              </a:spcBef>
+              <a:spcAft>
+                <a:spcPts val="0"/>
+              </a:spcAft>
+            </a:pPr>
+            <a:r>
+              <a:rPr lang="en-US" b="1" dirty="0"/>
+              <a:t>The Logic:</a:t>
+            </a:r>
+            <a:r>
+              <a:rPr lang="en-US" dirty="0"/>
+              <a:t> This behavior dates back to early Unix pipeline design (e.g., </a:t>
+            </a:r>
+            <a:r>
+              <a:rPr lang="en-US" sz="1100" b="0" i="0" u="none" strike="noStrike" cap="none" dirty="0">
+                <a:solidFill>
+                  <a:srgbClr val="000000"/>
+                </a:solidFill>
+                <a:latin typeface="Arial"/>
+                <a:ea typeface="Arial"/>
+                <a:cs typeface="Arial"/>
+                <a:sym typeface="Arial"/>
+              </a:rPr>
+              <a:t>cat file | head</a:t>
+            </a:r>
+            <a:r>
+              <a:rPr lang="en-US" dirty="0"/>
+              <a:t>), where if the reader (</a:t>
+            </a:r>
+            <a:r>
+              <a:rPr lang="en-US" sz="1100" b="0" i="0" u="none" strike="noStrike" cap="none" dirty="0">
+                <a:solidFill>
+                  <a:srgbClr val="000000"/>
+                </a:solidFill>
+                <a:latin typeface="Arial"/>
+                <a:ea typeface="Arial"/>
+                <a:cs typeface="Arial"/>
+                <a:sym typeface="Arial"/>
+              </a:rPr>
+              <a:t>head</a:t>
+            </a:r>
+            <a:r>
+              <a:rPr lang="en-US" dirty="0"/>
+              <a:t>) finishes and closes its input, the writer (</a:t>
+            </a:r>
+            <a:r>
+              <a:rPr lang="en-US" sz="1100" b="0" i="0" u="none" strike="noStrike" cap="none" dirty="0">
+                <a:solidFill>
+                  <a:srgbClr val="000000"/>
+                </a:solidFill>
+                <a:latin typeface="Arial"/>
+                <a:ea typeface="Arial"/>
+                <a:cs typeface="Arial"/>
+                <a:sym typeface="Arial"/>
+              </a:rPr>
+              <a:t>cat</a:t>
+            </a:r>
+            <a:r>
+              <a:rPr lang="en-US" dirty="0"/>
+              <a:t>) should stop immediately.</a:t>
+            </a:r>
+          </a:p>
+          <a:p>
+            <a:pPr marL="0" lvl="0" indent="0" algn="l" rtl="0">
+              <a:spcBef>
+                <a:spcPts val="0"/>
+              </a:spcBef>
+              <a:spcAft>
+                <a:spcPts val="0"/>
+              </a:spcAft>
+              <a:buNone/>
+            </a:pPr>
+            <a:endParaRPr lang="en-US" b="1" dirty="0"/>
+          </a:p>
+          <a:p>
+            <a:pPr marL="0" lvl="0" indent="0" algn="l" rtl="0">
+              <a:spcBef>
+                <a:spcPts val="0"/>
+              </a:spcBef>
+              <a:spcAft>
+                <a:spcPts val="0"/>
+              </a:spcAft>
+              <a:buNone/>
+            </a:pPr>
+            <a:r>
+              <a:rPr lang="en-US" b="1" dirty="0"/>
+              <a:t>The Solution: </a:t>
+            </a:r>
+            <a:r>
+              <a:rPr lang="en-US" sz="1100" b="1" i="0" u="none" strike="noStrike" cap="none" dirty="0">
+                <a:solidFill>
+                  <a:srgbClr val="000000"/>
+                </a:solidFill>
+                <a:latin typeface="Arial"/>
+                <a:ea typeface="Arial"/>
+                <a:cs typeface="Arial"/>
+                <a:sym typeface="Arial"/>
+              </a:rPr>
+              <a:t>MSG_NOSIGNAL</a:t>
+            </a:r>
+          </a:p>
+          <a:p>
+            <a:pPr marL="0" lvl="0" indent="0" algn="l" rtl="0">
+              <a:spcBef>
+                <a:spcPts val="0"/>
+              </a:spcBef>
+              <a:spcAft>
+                <a:spcPts val="0"/>
+              </a:spcAft>
+              <a:buNone/>
+            </a:pPr>
+            <a:r>
+              <a:rPr lang="en-US" dirty="0"/>
+              <a:t>Passing this flag tells the kernel: </a:t>
+            </a:r>
+          </a:p>
+          <a:p>
+            <a:pPr marL="0" lvl="0" indent="0" algn="l" rtl="0">
+              <a:spcBef>
+                <a:spcPts val="0"/>
+              </a:spcBef>
+              <a:spcAft>
+                <a:spcPts val="0"/>
+              </a:spcAft>
+              <a:buNone/>
+            </a:pPr>
+            <a:r>
+              <a:rPr lang="en-US" i="1" dirty="0"/>
+              <a:t>"If this send fails because the connection is dead, don't signal me. Just return an error and let me handle it in the code."</a:t>
+            </a:r>
+            <a:endParaRPr lang="en-US" dirty="0"/>
+          </a:p>
+          <a:p>
+            <a:pPr marL="0" lvl="0" indent="0" algn="l" rtl="0">
+              <a:spcBef>
+                <a:spcPts val="0"/>
+              </a:spcBef>
+              <a:spcAft>
+                <a:spcPts val="0"/>
+              </a:spcAft>
+              <a:buNone/>
+            </a:pPr>
             <a:endParaRPr dirty="0"/>
           </a:p>
         </p:txBody>
@@ -9995,7 +10609,76 @@
                 <a:cs typeface="Arial"/>
                 <a:sym typeface="Arial"/>
               </a:rPr>
-              <a:t>Specifies the address family/domain: AF_INET (IPv4), AF_INET6 (IPv6), or AF_UNIX/AF_LOCAL (local system communication).</a:t>
+              <a:t>Specifies the address family/domain:</a:t>
+            </a:r>
+          </a:p>
+          <a:p>
+            <a:pPr marL="171450" lvl="0" indent="-171450" algn="l" rtl="0">
+              <a:spcBef>
+                <a:spcPts val="0"/>
+              </a:spcBef>
+              <a:spcAft>
+                <a:spcPts val="0"/>
+              </a:spcAft>
+            </a:pPr>
+            <a:r>
+              <a:rPr lang="en-US" sz="1100" b="0" i="0" u="none" strike="noStrike" cap="none" dirty="0">
+                <a:solidFill>
+                  <a:srgbClr val="000000"/>
+                </a:solidFill>
+                <a:effectLst/>
+                <a:latin typeface="Arial"/>
+                <a:ea typeface="Arial"/>
+                <a:cs typeface="Arial"/>
+                <a:sym typeface="Arial"/>
+              </a:rPr>
+              <a:t>AF_INET (IPv4), </a:t>
+            </a:r>
+          </a:p>
+          <a:p>
+            <a:pPr marL="171450" lvl="0" indent="-171450" algn="l" rtl="0">
+              <a:spcBef>
+                <a:spcPts val="0"/>
+              </a:spcBef>
+              <a:spcAft>
+                <a:spcPts val="0"/>
+              </a:spcAft>
+            </a:pPr>
+            <a:r>
+              <a:rPr lang="en-US" sz="1100" b="0" i="0" u="none" strike="noStrike" cap="none" dirty="0">
+                <a:solidFill>
+                  <a:srgbClr val="000000"/>
+                </a:solidFill>
+                <a:effectLst/>
+                <a:latin typeface="Arial"/>
+                <a:ea typeface="Arial"/>
+                <a:cs typeface="Arial"/>
+                <a:sym typeface="Arial"/>
+              </a:rPr>
+              <a:t>AF_INET6 (IPv6), or </a:t>
+            </a:r>
+          </a:p>
+          <a:p>
+            <a:pPr marL="171450" lvl="0" indent="-171450" algn="l" rtl="0">
+              <a:spcBef>
+                <a:spcPts val="0"/>
+              </a:spcBef>
+              <a:spcAft>
+                <a:spcPts val="0"/>
+              </a:spcAft>
+            </a:pPr>
+            <a:r>
+              <a:rPr lang="en-US" sz="1100" b="0" i="0" u="none" strike="noStrike" cap="none" dirty="0">
+                <a:solidFill>
+                  <a:srgbClr val="000000"/>
+                </a:solidFill>
+                <a:effectLst/>
+                <a:latin typeface="Arial"/>
+                <a:ea typeface="Arial"/>
+                <a:cs typeface="Arial"/>
+                <a:sym typeface="Arial"/>
+              </a:rPr>
+              <a:t>AF_UNIX/AF_LOCAL (local system communication).</a:t>
             </a:r>
           </a:p>
           <a:p>
@@ -27503,22 +28186,30 @@
               <a:buNone/>
             </a:pPr>
             <a:r>
-              <a:rPr lang="en-US" sz="2200" b="1">
+              <a:rPr lang="en-US" sz="2200" b="1" dirty="0" err="1">
                 <a:solidFill>
                   <a:schemeClr val="accent4"/>
                 </a:solidFill>
               </a:rPr>
-              <a:t>sockfd: </a:t>
-            </a:r>
-            <a:r>
-              <a:rPr lang="en-US" sz="2200">
+              <a:t>sockfd</a:t>
+            </a:r>
+            <a:r>
+              <a:rPr lang="en-US" sz="2200" b="1" dirty="0">
+                <a:solidFill>
+                  <a:schemeClr val="accent4"/>
+                </a:solidFill>
+              </a:rPr>
+              <a:t>: </a:t>
+            </a:r>
+            <a:r>
+              <a:rPr lang="en-US" sz="2200" dirty="0">
                 <a:solidFill>
                   <a:schemeClr val="dk1"/>
                 </a:solidFill>
               </a:rPr>
               <a:t>This parameter is the file descriptor of the socket that you want to establish a connection with. It represents the local socket that you want to connect from. The socket must have been previously created with the socket() function.</a:t>
             </a:r>
-            <a:endParaRPr sz="2200">
+            <a:endParaRPr sz="2200" dirty="0">
               <a:solidFill>
                 <a:schemeClr val="dk1"/>
               </a:solidFill>
@@ -28370,22 +29061,46 @@
               <a:buNone/>
             </a:pPr>
             <a:r>
-              <a:rPr lang="en-US" sz="2200" b="1">
+              <a:rPr lang="en-US" sz="2200" b="1" dirty="0" err="1">
                 <a:solidFill>
                   <a:schemeClr val="accent4"/>
                 </a:solidFill>
               </a:rPr>
-              <a:t>servaddr: </a:t>
-            </a:r>
-            <a:r>
-              <a:rPr lang="en-US" sz="2200">
+              <a:t>servaddr</a:t>
+            </a:r>
+            <a:r>
+              <a:rPr lang="en-US" sz="2200" b="1" dirty="0">
+                <a:solidFill>
+                  <a:schemeClr val="accent4"/>
+                </a:solidFill>
+              </a:rPr>
+              <a:t>: </a:t>
+            </a:r>
+            <a:r>
+              <a:rPr lang="en-US" sz="2200" dirty="0">
                 <a:solidFill>
                   <a:schemeClr val="dk1"/>
                 </a:solidFill>
               </a:rPr>
-              <a:t>This should point to a properly initialized struct sockaddr containing the address and port number of the server to connect to. The address family (e.g., AF_INET for IPv4 or AF_INET6 for IPv6) should match the address family of the socket created.</a:t>
-            </a:r>
-            <a:endParaRPr sz="2200">
+              <a:t>This should point to a properly initialized struct </a:t>
+            </a:r>
+            <a:r>
+              <a:rPr lang="en-US" sz="2200" dirty="0" err="1">
+                <a:solidFill>
+                  <a:schemeClr val="dk1"/>
+                </a:solidFill>
+              </a:rPr>
+              <a:t>sockaddr</a:t>
+            </a:r>
+            <a:r>
+              <a:rPr lang="en-US" sz="2200" dirty="0">
+                <a:solidFill>
+                  <a:schemeClr val="dk1"/>
+                </a:solidFill>
+              </a:rPr>
+              <a:t> containing the address and port number of the server to connect to. The address family (e.g., AF_INET for IPv4 or AF_INET6 for IPv6) should match the address family of the socket created.</a:t>
+            </a:r>
+            <a:endParaRPr sz="2200" dirty="0">
               <a:solidFill>
                 <a:schemeClr val="dk1"/>
               </a:solidFill>
@@ -28579,22 +29294,78 @@
               <a:buNone/>
             </a:pPr>
             <a:r>
-              <a:rPr lang="en-US" sz="2200" b="1">
+              <a:rPr lang="en-US" sz="2200" b="1" dirty="0" err="1">
                 <a:solidFill>
                   <a:schemeClr val="accent4"/>
                 </a:solidFill>
               </a:rPr>
-              <a:t>addrlen: </a:t>
-            </a:r>
-            <a:r>
-              <a:rPr lang="en-US" sz="2200">
+              <a:t>addrlen</a:t>
+            </a:r>
+            <a:r>
+              <a:rPr lang="en-US" sz="2200" b="1" dirty="0">
+                <a:solidFill>
+                  <a:schemeClr val="accent4"/>
+                </a:solidFill>
+              </a:rPr>
+              <a:t>: </a:t>
+            </a:r>
+            <a:r>
+              <a:rPr lang="en-US" sz="2200" dirty="0">
                 <a:solidFill>
                   <a:schemeClr val="dk1"/>
                 </a:solidFill>
               </a:rPr>
-              <a:t>This should be set to the size of the address structure pointed to by servaddr. For example, if you are using IPv4, it would typically be sizeof(struct sockaddr_in).</a:t>
-            </a:r>
-            <a:endParaRPr sz="2200">
+              <a:t>This should be set to the size of the address structure pointed to by </a:t>
+            </a:r>
+            <a:r>
+              <a:rPr lang="en-US" sz="2200" dirty="0" err="1">
+                <a:solidFill>
+                  <a:schemeClr val="dk1"/>
+                </a:solidFill>
+              </a:rPr>
+              <a:t>servaddr</a:t>
+            </a:r>
+            <a:r>
+              <a:rPr lang="en-US" sz="2200" dirty="0">
+                <a:solidFill>
+                  <a:schemeClr val="dk1"/>
+                </a:solidFill>
+              </a:rPr>
+              <a:t>. For example, if you are using IPv4, it would typically be </a:t>
+            </a:r>
+            <a:r>
+              <a:rPr lang="en-US" sz="2200" dirty="0" err="1">
+                <a:solidFill>
+                  <a:schemeClr val="dk1"/>
+                </a:solidFill>
+              </a:rPr>
+              <a:t>sizeof</a:t>
+            </a:r>
+            <a:r>
+              <a:rPr lang="en-US" sz="2200" dirty="0">
+                <a:solidFill>
+                  <a:schemeClr val="dk1"/>
+                </a:solidFill>
+              </a:rPr>
+              <a:t>(struct </a:t>
+            </a:r>
+            <a:r>
+              <a:rPr lang="en-US" sz="2200" dirty="0" err="1">
+                <a:solidFill>
+                  <a:schemeClr val="dk1"/>
+                </a:solidFill>
+              </a:rPr>
+              <a:t>sockaddr_in</a:t>
+            </a:r>
+            <a:r>
+              <a:rPr lang="en-US" sz="2200" dirty="0">
+                <a:solidFill>
+                  <a:schemeClr val="dk1"/>
+                </a:solidFill>
+              </a:rPr>
+              <a:t>).</a:t>
+            </a:r>
+            <a:endParaRPr sz="2200" dirty="0">
               <a:solidFill>
                 <a:schemeClr val="dk1"/>
               </a:solidFill>
@@ -28779,7 +29550,7 @@
               <a:buNone/>
             </a:pPr>
             <a:r>
-              <a:rPr lang="en-US" sz="2200">
+              <a:rPr lang="en-US" sz="2200" dirty="0">
                 <a:solidFill>
                   <a:schemeClr val="dk2"/>
                 </a:solidFill>
@@ -28789,7 +29560,7 @@
               </a:rPr>
               <a:t>The bind() function in socket programming is used to associate a socket with a specific network address and port number on the local machine. Its primary purpose is to bind a unique identifier to the socket, allowing other processes to communicate with it using that address.</a:t>
             </a:r>
-            <a:endParaRPr sz="2200">
+            <a:endParaRPr sz="2200" dirty="0">
               <a:solidFill>
                 <a:schemeClr val="dk2"/>
               </a:solidFill>
@@ -28983,7 +29754,7 @@
               <a:buNone/>
             </a:pPr>
             <a:r>
-              <a:rPr lang="en-US" sz="2200" b="1">
+              <a:rPr lang="en-US" sz="2200" b="1" dirty="0">
                 <a:solidFill>
                   <a:schemeClr val="dk2"/>
                 </a:solidFill>
@@ -28991,14 +29762,14 @@
               <a:t>Assigning a Local Address</a:t>
             </a:r>
             <a:r>
-              <a:rPr lang="en-US" sz="2200">
+              <a:rPr lang="en-US" sz="2200" dirty="0">
                 <a:solidFill>
                   <a:schemeClr val="dk2"/>
                 </a:solidFill>
               </a:rPr>
               <a:t>: The bind() function assigns a local address to the socket, which includes both an IP address and a port number. This allows the socket to be uniquely identified within the network. The IP address specifies the network interface on the local machine, and the port number specifies the application or service running on that machine.</a:t>
             </a:r>
-            <a:endParaRPr sz="2200">
+            <a:endParaRPr sz="2200" dirty="0">
               <a:solidFill>
                 <a:schemeClr val="dk2"/>
               </a:solidFill>
@@ -31048,7 +31819,7 @@
               <a:buNone/>
             </a:pPr>
             <a:r>
-              <a:rPr lang="en-US" sz="2200" b="1">
+              <a:rPr lang="en-US" sz="2200" b="1" dirty="0">
                 <a:solidFill>
                   <a:schemeClr val="dk2"/>
                 </a:solidFill>
@@ -31056,14 +31827,14 @@
               <a:t>Socket Identification: </a:t>
             </a:r>
             <a:r>
-              <a:rPr lang="en-US" sz="2200">
+              <a:rPr lang="en-US" sz="2200" dirty="0">
                 <a:solidFill>
                   <a:schemeClr val="dk2"/>
                 </a:solidFill>
               </a:rPr>
               <a:t>By binding a socket to a specific address and port, the bind() function allows other processes on the same machine or on remote machines to connect to or send data to that socket. This enables communication between processes running on different machines over a network.</a:t>
             </a:r>
-            <a:endParaRPr sz="2200">
+            <a:endParaRPr sz="2200" dirty="0">
               <a:solidFill>
                 <a:schemeClr val="dk2"/>
               </a:solidFill>
@@ -31257,7 +32028,7 @@
               <a:buNone/>
             </a:pPr>
             <a:r>
-              <a:rPr lang="en-US" sz="2200" b="1">
+              <a:rPr lang="en-US" sz="2200" b="1" dirty="0" err="1">
                 <a:solidFill>
                   <a:schemeClr val="accent4"/>
                 </a:solidFill>
@@ -31265,14 +32036,14 @@
               <a:t>sockfd</a:t>
             </a:r>
             <a:r>
-              <a:rPr lang="en-US" sz="2200">
+              <a:rPr lang="en-US" sz="2200" dirty="0">
                 <a:solidFill>
                   <a:schemeClr val="dk2"/>
                 </a:solidFill>
               </a:rPr>
               <a:t>: This parameter is the file descriptor of the socket that you want to bind. It represents the local socket that you want to associate with a specific network address and port number. The socket must have been previously created with the socket() function.</a:t>
             </a:r>
-            <a:endParaRPr sz="2200">
+            <a:endParaRPr sz="2200" dirty="0">
               <a:solidFill>
                 <a:schemeClr val="dk1"/>
               </a:solidFill>
@@ -31466,22 +32237,62 @@
               <a:buNone/>
             </a:pPr>
             <a:r>
-              <a:rPr lang="en-US" sz="2200" b="1">
+              <a:rPr lang="en-US" sz="2200" b="1" dirty="0" err="1">
                 <a:solidFill>
                   <a:schemeClr val="accent4"/>
                 </a:solidFill>
               </a:rPr>
-              <a:t>servaddr: </a:t>
-            </a:r>
-            <a:r>
-              <a:rPr lang="en-US" sz="2200">
+              <a:t>servaddr</a:t>
+            </a:r>
+            <a:r>
+              <a:rPr lang="en-US" sz="2200" b="1" dirty="0">
+                <a:solidFill>
+                  <a:schemeClr val="accent4"/>
+                </a:solidFill>
+              </a:rPr>
+              <a:t>: </a:t>
+            </a:r>
+            <a:r>
+              <a:rPr lang="en-US" sz="2200" dirty="0">
                 <a:solidFill>
                   <a:schemeClr val="dk1"/>
                 </a:solidFill>
               </a:rPr>
-              <a:t>This parameter is a pointer to a struct sockaddr that contains the address information (IP address and port number) you want to bind to the socket. It represents the local address to which you want to bind the socket. The struct sockaddr is a generic structure used to represent socket addresses and must be properly initialized.</a:t>
-            </a:r>
-            <a:endParaRPr sz="2200">
+              <a:t>This parameter is a pointer to a struct </a:t>
+            </a:r>
+            <a:r>
+              <a:rPr lang="en-US" sz="2200" dirty="0" err="1">
+                <a:solidFill>
+                  <a:schemeClr val="dk1"/>
+                </a:solidFill>
+              </a:rPr>
+              <a:t>sockaddr</a:t>
+            </a:r>
+            <a:r>
+              <a:rPr lang="en-US" sz="2200" dirty="0">
+                <a:solidFill>
+                  <a:schemeClr val="dk1"/>
+                </a:solidFill>
+              </a:rPr>
+              <a:t> that contains the address information (IP address and port number) you want to bind to the socket. It represents the local address to which you want to bind the socket. The struct </a:t>
+            </a:r>
+            <a:r>
+              <a:rPr lang="en-US" sz="2200" dirty="0" err="1">
+                <a:solidFill>
+                  <a:schemeClr val="dk1"/>
+                </a:solidFill>
+              </a:rPr>
+              <a:t>sockaddr</a:t>
+            </a:r>
+            <a:r>
+              <a:rPr lang="en-US" sz="2200" dirty="0">
+                <a:solidFill>
+                  <a:schemeClr val="dk1"/>
+                </a:solidFill>
+              </a:rPr>
+              <a:t> is a generic structure used to represent socket addresses and must be properly initialized.</a:t>
+            </a:r>
+            <a:endParaRPr sz="2200" dirty="0">
               <a:solidFill>
                 <a:schemeClr val="dk1"/>
               </a:solidFill>
@@ -31878,7 +32689,7 @@
               <a:buNone/>
             </a:pPr>
             <a:r>
-              <a:rPr lang="en-US" sz="2200">
+              <a:rPr lang="en-US" sz="2200" dirty="0">
                 <a:solidFill>
                   <a:schemeClr val="dk1"/>
                 </a:solidFill>
@@ -31889,7 +32700,7 @@
               <a:t>The listen() function in socket programming is used by a server to mark a socket as passive, meaning that it will be </a:t>
             </a:r>
             <a:r>
-              <a:rPr lang="en-US" sz="2200" u="sng">
+              <a:rPr lang="en-US" sz="2200" u="sng" dirty="0">
                 <a:solidFill>
                   <a:schemeClr val="dk1"/>
                 </a:solidFill>
@@ -31900,7 +32711,7 @@
               <a:t>used to accept incoming connection requests from clients</a:t>
             </a:r>
             <a:r>
-              <a:rPr lang="en-US" sz="2200">
+              <a:rPr lang="en-US" sz="2200" dirty="0">
                 <a:solidFill>
                   <a:schemeClr val="dk1"/>
                 </a:solidFill>
@@ -31910,7 +32721,7 @@
               </a:rPr>
               <a:t>. </a:t>
             </a:r>
-            <a:endParaRPr sz="2200">
+            <a:endParaRPr sz="2200" dirty="0">
               <a:solidFill>
                 <a:schemeClr val="dk1"/>
               </a:solidFill>
@@ -31932,7 +32743,7 @@
               </a:spcAft>
               <a:buNone/>
             </a:pPr>
-            <a:endParaRPr sz="2200">
+            <a:endParaRPr sz="2200" dirty="0">
               <a:solidFill>
                 <a:schemeClr val="dk1"/>
               </a:solidFill>
@@ -31955,7 +32766,7 @@
               <a:buNone/>
             </a:pPr>
             <a:r>
-              <a:rPr lang="en-US" sz="2200">
+              <a:rPr lang="en-US" sz="2200" dirty="0">
                 <a:solidFill>
                   <a:schemeClr val="dk1"/>
                 </a:solidFill>
@@ -31965,7 +32776,7 @@
               </a:rPr>
               <a:t>Its primary purpose is to prepare a socket for incoming connections and to specify the maximum number of pending connections that can be queued up waiting for acceptance.</a:t>
             </a:r>
-            <a:endParaRPr sz="2200">
+            <a:endParaRPr sz="2200" dirty="0">
               <a:solidFill>
                 <a:schemeClr val="dk1"/>
               </a:solidFill>
@@ -32162,7 +32973,7 @@
               <a:buNone/>
             </a:pPr>
             <a:r>
-              <a:rPr lang="en-US" sz="2200" b="1">
+              <a:rPr lang="en-US" sz="2200" b="1" dirty="0" err="1">
                 <a:solidFill>
                   <a:schemeClr val="accent4"/>
                 </a:solidFill>
@@ -32170,14 +32981,14 @@
               <a:t>sockfd</a:t>
             </a:r>
             <a:r>
-              <a:rPr lang="en-US" sz="2200">
+              <a:rPr lang="en-US" sz="2200" dirty="0">
                 <a:solidFill>
                   <a:schemeClr val="dk1"/>
                 </a:solidFill>
               </a:rPr>
               <a:t>: This parameter is the file descriptor of the socket that you want to start listening on. The socket must have been previously created with the socket() function and bound to a local address using the bind() function. This descriptor uniquely identifies the socket in the operating system.</a:t>
             </a:r>
-            <a:endParaRPr sz="2200">
+            <a:endParaRPr sz="2200" dirty="0">
               <a:solidFill>
                 <a:schemeClr val="dk1"/>
               </a:solidFill>
@@ -33052,7 +33863,7 @@
               <a:buNone/>
             </a:pPr>
             <a:r>
-              <a:rPr lang="en-US" sz="2200" b="1">
+              <a:rPr lang="en-US" sz="2200" b="1" dirty="0" err="1">
                 <a:solidFill>
                   <a:schemeClr val="accent4"/>
                 </a:solidFill>
@@ -33060,7 +33871,7 @@
               <a:t>cliaddr</a:t>
             </a:r>
             <a:r>
-              <a:rPr lang="en-US" sz="2200" b="1">
+              <a:rPr lang="en-US" sz="2200" b="1" dirty="0">
                 <a:solidFill>
                   <a:schemeClr val="dk1"/>
                 </a:solidFill>
@@ -33068,30 +33879,78 @@
               <a:t>: </a:t>
             </a:r>
             <a:r>
-              <a:rPr lang="en-US" sz="2200">
+              <a:rPr lang="en-US" sz="2200" dirty="0">
                 <a:solidFill>
                   <a:schemeClr val="dk1"/>
                 </a:solidFill>
               </a:rPr>
-              <a:t>This is a pointer to a struct sockaddr that will be filled in by accept() with the address information of the client that is connecting to the server. I</a:t>
-            </a:r>
-            <a:r>
-              <a:rPr lang="en-US" sz="2200" u="sng">
+              <a:t>This is a pointer to a struct </a:t>
+            </a:r>
+            <a:r>
+              <a:rPr lang="en-US" sz="2200" dirty="0" err="1">
                 <a:solidFill>
                   <a:schemeClr val="dk1"/>
                 </a:solidFill>
               </a:rPr>
+              <a:t>sockaddr</a:t>
+            </a:r>
+            <a:r>
+              <a:rPr lang="en-US" sz="2200" dirty="0">
+                <a:solidFill>
+                  <a:schemeClr val="dk1"/>
+                </a:solidFill>
+              </a:rPr>
+              <a:t> that will be filled in by accept() with the address information of the client that is connecting to the server. I</a:t>
+            </a:r>
+            <a:r>
+              <a:rPr lang="en-US" sz="2200" u="sng" dirty="0">
+                <a:solidFill>
+                  <a:schemeClr val="dk1"/>
+                </a:solidFill>
+              </a:rPr>
               <a:t>t represents the address of the client.</a:t>
             </a:r>
             <a:r>
-              <a:rPr lang="en-US" sz="2200">
+              <a:rPr lang="en-US" sz="2200" dirty="0">
                 <a:solidFill>
                   <a:schemeClr val="dk1"/>
                 </a:solidFill>
               </a:rPr>
-              <a:t> The struct sockaddr is a generic structure used to represent socket addresses and must be properly initialized. Depending on the address family (e.g., IPv4 or IPv6), it can be cast to struct sockaddr_in or struct sockaddr_in6 for IPv4 and IPv6 respectively.</a:t>
-            </a:r>
-            <a:endParaRPr sz="2200">
+              <a:t> The struct </a:t>
+            </a:r>
+            <a:r>
+              <a:rPr lang="en-US" sz="2200" dirty="0" err="1">
+                <a:solidFill>
+                  <a:schemeClr val="dk1"/>
+                </a:solidFill>
+              </a:rPr>
+              <a:t>sockaddr</a:t>
+            </a:r>
+            <a:r>
+              <a:rPr lang="en-US" sz="2200" dirty="0">
+                <a:solidFill>
+                  <a:schemeClr val="dk1"/>
+                </a:solidFill>
+              </a:rPr>
+              <a:t> is a generic structure used to represent socket addresses and must be properly initialized. Depending on the address family (e.g., IPv4 or IPv6), it can be cast to struct </a:t>
+            </a:r>
+            <a:r>
+              <a:rPr lang="en-US" sz="2200" dirty="0" err="1">
+                <a:solidFill>
+                  <a:schemeClr val="dk1"/>
+                </a:solidFill>
+              </a:rPr>
+              <a:t>sockaddr_in</a:t>
+            </a:r>
+            <a:r>
+              <a:rPr lang="en-US" sz="2200" dirty="0">
+                <a:solidFill>
+                  <a:schemeClr val="dk1"/>
+                </a:solidFill>
+              </a:rPr>
+              <a:t> or struct sockaddr_in6 for IPv4 and IPv6 respectively.</a:t>
+            </a:r>
+            <a:endParaRPr sz="2200" dirty="0">
               <a:solidFill>
                 <a:schemeClr val="dk1"/>
               </a:solidFill>
@@ -33685,7 +34544,7 @@
               <a:buNone/>
             </a:pPr>
             <a:r>
-              <a:rPr lang="en-US" sz="2200">
+              <a:rPr lang="en-US" sz="2200" dirty="0">
                 <a:solidFill>
                   <a:schemeClr val="dk1"/>
                 </a:solidFill>
@@ -33695,7 +34554,7 @@
               </a:rPr>
               <a:t>The send() function in socket programming is used to send data on a connected socket.</a:t>
             </a:r>
-            <a:endParaRPr sz="2200">
+            <a:endParaRPr sz="2200" dirty="0">
               <a:solidFill>
                 <a:schemeClr val="dk1"/>
               </a:solidFill>
@@ -34858,7 +35717,7 @@
               <a:buNone/>
             </a:pPr>
             <a:r>
-              <a:rPr lang="en-US" sz="2200">
+              <a:rPr lang="en-US" sz="2200" dirty="0">
                 <a:solidFill>
                   <a:schemeClr val="dk1"/>
                 </a:solidFill>
@@ -34866,9 +35725,31 @@
                   <a:srgbClr val="00FF00"/>
                 </a:highlight>
               </a:rPr>
-              <a:t>The recv() function in socket programming is used to receive data from a connected socket.</a:t>
-            </a:r>
-            <a:endParaRPr sz="2200">
+              <a:t>The </a:t>
+            </a:r>
+            <a:r>
+              <a:rPr lang="en-US" sz="2200" dirty="0" err="1">
+                <a:solidFill>
+                  <a:schemeClr val="dk1"/>
+                </a:solidFill>
+                <a:highlight>
+                  <a:srgbClr val="00FF00"/>
+                </a:highlight>
+              </a:rPr>
+              <a:t>recv</a:t>
+            </a:r>
+            <a:r>
+              <a:rPr lang="en-US" sz="2200" dirty="0">
+                <a:solidFill>
+                  <a:schemeClr val="dk1"/>
+                </a:solidFill>
+                <a:highlight>
+                  <a:srgbClr val="00FF00"/>
+                </a:highlight>
+              </a:rPr>
+              <a:t>() function in socket programming is used to receive data from a connected socket.</a:t>
+            </a:r>
+            <a:endParaRPr sz="2200" dirty="0">
               <a:solidFill>
                 <a:schemeClr val="dk1"/>
               </a:solidFill>
@@ -36107,7 +36988,7 @@
               <a:buNone/>
             </a:pPr>
             <a:r>
-              <a:rPr lang="en-US" sz="2200" b="1">
+              <a:rPr lang="en-US" sz="2200" b="1" dirty="0">
                 <a:solidFill>
                   <a:schemeClr val="accent4"/>
                 </a:solidFill>
@@ -36115,14 +36996,30 @@
               <a:t>flags: </a:t>
             </a:r>
             <a:r>
-              <a:rPr lang="en-US" sz="2200">
+              <a:rPr lang="en-US" sz="2200" dirty="0">
                 <a:solidFill>
                   <a:schemeClr val="dk1"/>
                 </a:solidFill>
               </a:rPr>
-              <a:t>This parameter is used to modify the behavior of the recv() function. It can be set to various flag values to control aspects of the reception, such as setting socket options or specifying how the data should be received. Common flag values include 0 for default behavior or MSG_WAITALL to block until the full amount of requested data is received.</a:t>
-            </a:r>
-            <a:endParaRPr sz="2200">
+              <a:t>This parameter is used to modify the behavior of the </a:t>
+            </a:r>
+            <a:r>
+              <a:rPr lang="en-US" sz="2200" dirty="0" err="1">
+                <a:solidFill>
+                  <a:schemeClr val="dk1"/>
+                </a:solidFill>
+              </a:rPr>
+              <a:t>recv</a:t>
+            </a:r>
+            <a:r>
+              <a:rPr lang="en-US" sz="2200" dirty="0">
+                <a:solidFill>
+                  <a:schemeClr val="dk1"/>
+                </a:solidFill>
+              </a:rPr>
+              <a:t>() function. It can be set to various flag values to control aspects of the reception, such as setting socket options or specifying how the data should be received. Common flag values include 0 for default behavior or MSG_WAITALL to block until the full amount of requested data is received.</a:t>
+            </a:r>
+            <a:endParaRPr sz="2200" dirty="0">
               <a:solidFill>
                 <a:schemeClr val="dk1"/>
               </a:solidFill>

--- a/Lecture Slides/23 - Networking - Socket Functions.pptx
+++ b/Lecture Slides/23 - Networking - Socket Functions.pptx
@@ -30159,6 +30159,67 @@
             </a:endParaRPr>
           </a:p>
           <a:p>
+            <a:pPr marL="356235" indent="-343535">
+              <a:spcBef>
+                <a:spcPts val="900"/>
+              </a:spcBef>
+              <a:buClrTx/>
+              <a:buFontTx/>
+              <a:buChar char="●"/>
+              <a:tabLst>
+                <a:tab pos="356235" algn="l"/>
+              </a:tabLst>
+              <a:defRPr/>
+            </a:pPr>
+            <a:r>
+              <a:rPr lang="en-US" sz="1500" spc="-10" dirty="0">
+                <a:solidFill>
+                  <a:schemeClr val="tx1"/>
+                </a:solidFill>
+                <a:latin typeface="Arial MT"/>
+                <a:cs typeface="Arial MT"/>
+              </a:rPr>
+              <a:t>Client-</a:t>
+            </a:r>
+            <a:r>
+              <a:rPr lang="en-US" sz="1500" dirty="0">
+                <a:solidFill>
+                  <a:schemeClr val="tx1"/>
+                </a:solidFill>
+                <a:latin typeface="Arial MT"/>
+                <a:cs typeface="Arial MT"/>
+              </a:rPr>
+              <a:t>Server</a:t>
+            </a:r>
+            <a:r>
+              <a:rPr lang="en-US" sz="1500" spc="-25" dirty="0">
+                <a:solidFill>
+                  <a:schemeClr val="tx1"/>
+                </a:solidFill>
+                <a:latin typeface="Arial MT"/>
+                <a:cs typeface="Arial MT"/>
+              </a:rPr>
+              <a:t> </a:t>
+            </a:r>
+            <a:r>
+              <a:rPr lang="en-US" sz="1500" spc="-10" dirty="0">
+                <a:solidFill>
+                  <a:schemeClr val="tx1"/>
+                </a:solidFill>
+                <a:latin typeface="Arial MT"/>
+                <a:cs typeface="Arial MT"/>
+              </a:rPr>
+              <a:t>Model</a:t>
+            </a:r>
+            <a:endParaRPr lang="en-US" sz="1500" dirty="0">
+              <a:solidFill>
+                <a:schemeClr val="tx1"/>
+              </a:solidFill>
+              <a:latin typeface="Arial MT"/>
+              <a:cs typeface="Arial MT"/>
+            </a:endParaRPr>
+          </a:p>
+          <a:p>
             <a:pPr marL="356235" marR="0" lvl="0" indent="-343535" defTabSz="914400" eaLnBrk="1" fontAlgn="auto" latinLnBrk="0" hangingPunct="1">
               <a:lnSpc>
                 <a:spcPct val="100000"/>
@@ -30323,6 +30384,177 @@
             </a:endParaRPr>
           </a:p>
           <a:p>
+            <a:pPr marL="356235" lvl="0" indent="-343535">
+              <a:spcBef>
+                <a:spcPts val="900"/>
+              </a:spcBef>
+              <a:buClrTx/>
+              <a:buFontTx/>
+              <a:buChar char="●"/>
+              <a:tabLst>
+                <a:tab pos="356235" algn="l"/>
+              </a:tabLst>
+              <a:defRPr/>
+            </a:pPr>
+            <a:r>
+              <a:rPr lang="en-US" sz="1500" dirty="0">
+                <a:solidFill>
+                  <a:schemeClr val="tx1"/>
+                </a:solidFill>
+                <a:latin typeface="Arial MT"/>
+                <a:cs typeface="Arial MT"/>
+              </a:rPr>
+              <a:t>Host</a:t>
+            </a:r>
+            <a:r>
+              <a:rPr lang="en-US" sz="1500" spc="-40" dirty="0">
+                <a:solidFill>
+                  <a:schemeClr val="tx1"/>
+                </a:solidFill>
+                <a:latin typeface="Arial MT"/>
+                <a:cs typeface="Arial MT"/>
+              </a:rPr>
+              <a:t> </a:t>
+            </a:r>
+            <a:r>
+              <a:rPr lang="en-US" sz="1500" dirty="0">
+                <a:solidFill>
+                  <a:schemeClr val="tx1"/>
+                </a:solidFill>
+                <a:latin typeface="Arial MT"/>
+                <a:cs typeface="Arial MT"/>
+              </a:rPr>
+              <a:t>Byte</a:t>
+            </a:r>
+            <a:r>
+              <a:rPr lang="en-US" sz="1500" spc="-35" dirty="0">
+                <a:solidFill>
+                  <a:schemeClr val="tx1"/>
+                </a:solidFill>
+                <a:latin typeface="Arial MT"/>
+                <a:cs typeface="Arial MT"/>
+              </a:rPr>
+              <a:t> </a:t>
+            </a:r>
+            <a:r>
+              <a:rPr lang="en-US" sz="1500" dirty="0">
+                <a:solidFill>
+                  <a:schemeClr val="tx1"/>
+                </a:solidFill>
+                <a:latin typeface="Arial MT"/>
+                <a:cs typeface="Arial MT"/>
+              </a:rPr>
+              <a:t>Order</a:t>
+            </a:r>
+            <a:r>
+              <a:rPr lang="en-US" sz="1500" spc="-35" dirty="0">
+                <a:solidFill>
+                  <a:schemeClr val="tx1"/>
+                </a:solidFill>
+                <a:latin typeface="Arial MT"/>
+                <a:cs typeface="Arial MT"/>
+              </a:rPr>
+              <a:t> </a:t>
+            </a:r>
+            <a:r>
+              <a:rPr lang="en-US" sz="1500" dirty="0">
+                <a:solidFill>
+                  <a:schemeClr val="tx1"/>
+                </a:solidFill>
+                <a:latin typeface="Arial MT"/>
+                <a:cs typeface="Arial MT"/>
+              </a:rPr>
+              <a:t>to</a:t>
+            </a:r>
+            <a:r>
+              <a:rPr lang="en-US" sz="1500" spc="-35" dirty="0">
+                <a:solidFill>
+                  <a:schemeClr val="tx1"/>
+                </a:solidFill>
+                <a:latin typeface="Arial MT"/>
+                <a:cs typeface="Arial MT"/>
+              </a:rPr>
+              <a:t> </a:t>
+            </a:r>
+            <a:r>
+              <a:rPr lang="en-US" sz="1500" dirty="0">
+                <a:solidFill>
+                  <a:schemeClr val="tx1"/>
+                </a:solidFill>
+                <a:latin typeface="Arial MT"/>
+                <a:cs typeface="Arial MT"/>
+              </a:rPr>
+              <a:t>Network</a:t>
+            </a:r>
+            <a:r>
+              <a:rPr lang="en-US" sz="1500" spc="-35" dirty="0">
+                <a:solidFill>
+                  <a:schemeClr val="tx1"/>
+                </a:solidFill>
+                <a:latin typeface="Arial MT"/>
+                <a:cs typeface="Arial MT"/>
+              </a:rPr>
+              <a:t> </a:t>
+            </a:r>
+            <a:r>
+              <a:rPr lang="en-US" sz="1500" dirty="0">
+                <a:solidFill>
+                  <a:schemeClr val="tx1"/>
+                </a:solidFill>
+                <a:latin typeface="Arial MT"/>
+                <a:cs typeface="Arial MT"/>
+              </a:rPr>
+              <a:t>Byte</a:t>
+            </a:r>
+            <a:r>
+              <a:rPr lang="en-US" sz="1500" spc="-35" dirty="0">
+                <a:solidFill>
+                  <a:schemeClr val="tx1"/>
+                </a:solidFill>
+                <a:latin typeface="Arial MT"/>
+                <a:cs typeface="Arial MT"/>
+              </a:rPr>
+              <a:t> </a:t>
+            </a:r>
+            <a:r>
+              <a:rPr lang="en-US" sz="1500" dirty="0">
+                <a:solidFill>
+                  <a:schemeClr val="tx1"/>
+                </a:solidFill>
+                <a:latin typeface="Arial MT"/>
+                <a:cs typeface="Arial MT"/>
+              </a:rPr>
+              <a:t>Order</a:t>
+            </a:r>
+            <a:r>
+              <a:rPr lang="en-US" sz="1500" spc="-35" dirty="0">
+                <a:solidFill>
+                  <a:schemeClr val="tx1"/>
+                </a:solidFill>
+                <a:latin typeface="Arial MT"/>
+                <a:cs typeface="Arial MT"/>
+              </a:rPr>
+              <a:t> </a:t>
+            </a:r>
+            <a:r>
+              <a:rPr lang="en-US" sz="1500" spc="-10" dirty="0">
+                <a:solidFill>
+                  <a:schemeClr val="tx1"/>
+                </a:solidFill>
+                <a:latin typeface="Arial MT"/>
+                <a:cs typeface="Arial MT"/>
+              </a:rPr>
+              <a:t>Conversion</a:t>
+            </a:r>
+            <a:endParaRPr lang="en-US" sz="1500" dirty="0">
+              <a:solidFill>
+                <a:schemeClr val="tx1"/>
+              </a:solidFill>
+              <a:latin typeface="Arial MT"/>
+              <a:cs typeface="Arial MT"/>
+            </a:endParaRPr>
+          </a:p>
+          <a:p>
             <a:pPr marL="356235" marR="0" lvl="0" indent="-343535" defTabSz="914400" eaLnBrk="1" fontAlgn="auto" latinLnBrk="0" hangingPunct="1">
               <a:lnSpc>
                 <a:spcPct val="100000"/>
@@ -30638,420 +30870,6 @@
               </a:ln>
               <a:solidFill>
                 <a:schemeClr val="tx1"/>
-              </a:solidFill>
-              <a:effectLst/>
-              <a:uLnTx/>
-              <a:uFillTx/>
-              <a:latin typeface="Arial MT"/>
-              <a:cs typeface="Arial MT"/>
-            </a:endParaRPr>
-          </a:p>
-          <a:p>
-            <a:pPr marL="356235" marR="0" lvl="0" indent="-343535" defTabSz="914400" eaLnBrk="1" fontAlgn="auto" latinLnBrk="0" hangingPunct="1">
-              <a:lnSpc>
-                <a:spcPct val="100000"/>
-              </a:lnSpc>
-              <a:spcBef>
-                <a:spcPts val="900"/>
-              </a:spcBef>
-              <a:spcAft>
-                <a:spcPts val="0"/>
-              </a:spcAft>
-              <a:buClrTx/>
-              <a:buSzTx/>
-              <a:buFontTx/>
-              <a:buChar char="●"/>
-              <a:tabLst>
-                <a:tab pos="356235" algn="l"/>
-              </a:tabLst>
-              <a:defRPr/>
-            </a:pPr>
-            <a:r>
-              <a:rPr kumimoji="0" sz="1500" b="0" i="0" u="none" strike="noStrike" kern="0" cap="none" spc="-10" normalizeH="0" baseline="0" noProof="0" dirty="0">
-                <a:ln>
-                  <a:noFill/>
-                </a:ln>
-                <a:solidFill>
-                  <a:schemeClr val="bg1">
-                    <a:lumMod val="65000"/>
-                  </a:schemeClr>
-                </a:solidFill>
-                <a:effectLst/>
-                <a:uLnTx/>
-                <a:uFillTx/>
-                <a:latin typeface="Arial MT"/>
-                <a:cs typeface="Arial MT"/>
-              </a:rPr>
-              <a:t>Client-</a:t>
-            </a:r>
-            <a:r>
-              <a:rPr kumimoji="0" sz="1500" b="0" i="0" u="none" strike="noStrike" kern="0" cap="none" spc="0" normalizeH="0" baseline="0" noProof="0" dirty="0">
-                <a:ln>
-                  <a:noFill/>
-                </a:ln>
-                <a:solidFill>
-                  <a:schemeClr val="bg1">
-                    <a:lumMod val="65000"/>
-                  </a:schemeClr>
-                </a:solidFill>
-                <a:effectLst/>
-                <a:uLnTx/>
-                <a:uFillTx/>
-                <a:latin typeface="Arial MT"/>
-                <a:cs typeface="Arial MT"/>
-              </a:rPr>
-              <a:t>Server</a:t>
-            </a:r>
-            <a:r>
-              <a:rPr kumimoji="0" sz="1500" b="0" i="0" u="none" strike="noStrike" kern="0" cap="none" spc="-25" normalizeH="0" baseline="0" noProof="0" dirty="0">
-                <a:ln>
-                  <a:noFill/>
-                </a:ln>
-                <a:solidFill>
-                  <a:schemeClr val="bg1">
-                    <a:lumMod val="65000"/>
-                  </a:schemeClr>
-                </a:solidFill>
-                <a:effectLst/>
-                <a:uLnTx/>
-                <a:uFillTx/>
-                <a:latin typeface="Arial MT"/>
-                <a:cs typeface="Arial MT"/>
-              </a:rPr>
-              <a:t> </a:t>
-            </a:r>
-            <a:r>
-              <a:rPr kumimoji="0" sz="1500" b="0" i="0" u="none" strike="noStrike" kern="0" cap="none" spc="-10" normalizeH="0" baseline="0" noProof="0" dirty="0">
-                <a:ln>
-                  <a:noFill/>
-                </a:ln>
-                <a:solidFill>
-                  <a:schemeClr val="bg1">
-                    <a:lumMod val="65000"/>
-                  </a:schemeClr>
-                </a:solidFill>
-                <a:effectLst/>
-                <a:uLnTx/>
-                <a:uFillTx/>
-                <a:latin typeface="Arial MT"/>
-                <a:cs typeface="Arial MT"/>
-              </a:rPr>
-              <a:t>Model</a:t>
-            </a:r>
-            <a:endParaRPr kumimoji="0" sz="1500" b="0" i="0" u="none" strike="noStrike" kern="0" cap="none" spc="0" normalizeH="0" baseline="0" noProof="0" dirty="0">
-              <a:ln>
-                <a:noFill/>
-              </a:ln>
-              <a:solidFill>
-                <a:schemeClr val="bg1">
-                  <a:lumMod val="65000"/>
-                </a:schemeClr>
-              </a:solidFill>
-              <a:effectLst/>
-              <a:uLnTx/>
-              <a:uFillTx/>
-              <a:latin typeface="Arial MT"/>
-              <a:cs typeface="Arial MT"/>
-            </a:endParaRPr>
-          </a:p>
-          <a:p>
-            <a:pPr marL="356235" marR="0" lvl="0" indent="-343535" defTabSz="914400" eaLnBrk="1" fontAlgn="auto" latinLnBrk="0" hangingPunct="1">
-              <a:lnSpc>
-                <a:spcPct val="100000"/>
-              </a:lnSpc>
-              <a:spcBef>
-                <a:spcPts val="900"/>
-              </a:spcBef>
-              <a:spcAft>
-                <a:spcPts val="0"/>
-              </a:spcAft>
-              <a:buClrTx/>
-              <a:buSzTx/>
-              <a:buFontTx/>
-              <a:buChar char="●"/>
-              <a:tabLst>
-                <a:tab pos="356235" algn="l"/>
-              </a:tabLst>
-              <a:defRPr/>
-            </a:pPr>
-            <a:r>
-              <a:rPr kumimoji="0" sz="1500" b="0" i="0" u="none" strike="noStrike" kern="0" cap="none" spc="0" normalizeH="0" baseline="0" noProof="0" dirty="0">
-                <a:ln>
-                  <a:noFill/>
-                </a:ln>
-                <a:solidFill>
-                  <a:schemeClr val="bg1">
-                    <a:lumMod val="65000"/>
-                  </a:schemeClr>
-                </a:solidFill>
-                <a:effectLst/>
-                <a:uLnTx/>
-                <a:uFillTx/>
-                <a:latin typeface="Arial MT"/>
-                <a:cs typeface="Arial MT"/>
-              </a:rPr>
-              <a:t>Host</a:t>
-            </a:r>
-            <a:r>
-              <a:rPr kumimoji="0" sz="1500" b="0" i="0" u="none" strike="noStrike" kern="0" cap="none" spc="-40" normalizeH="0" baseline="0" noProof="0" dirty="0">
-                <a:ln>
-                  <a:noFill/>
-                </a:ln>
-                <a:solidFill>
-                  <a:schemeClr val="bg1">
-                    <a:lumMod val="65000"/>
-                  </a:schemeClr>
-                </a:solidFill>
-                <a:effectLst/>
-                <a:uLnTx/>
-                <a:uFillTx/>
-                <a:latin typeface="Arial MT"/>
-                <a:cs typeface="Arial MT"/>
-              </a:rPr>
-              <a:t> </a:t>
-            </a:r>
-            <a:r>
-              <a:rPr kumimoji="0" sz="1500" b="0" i="0" u="none" strike="noStrike" kern="0" cap="none" spc="0" normalizeH="0" baseline="0" noProof="0" dirty="0">
-                <a:ln>
-                  <a:noFill/>
-                </a:ln>
-                <a:solidFill>
-                  <a:schemeClr val="bg1">
-                    <a:lumMod val="65000"/>
-                  </a:schemeClr>
-                </a:solidFill>
-                <a:effectLst/>
-                <a:uLnTx/>
-                <a:uFillTx/>
-                <a:latin typeface="Arial MT"/>
-                <a:cs typeface="Arial MT"/>
-              </a:rPr>
-              <a:t>Byte</a:t>
-            </a:r>
-            <a:r>
-              <a:rPr kumimoji="0" sz="1500" b="0" i="0" u="none" strike="noStrike" kern="0" cap="none" spc="-35" normalizeH="0" baseline="0" noProof="0" dirty="0">
-                <a:ln>
-                  <a:noFill/>
-                </a:ln>
-                <a:solidFill>
-                  <a:schemeClr val="bg1">
-                    <a:lumMod val="65000"/>
-                  </a:schemeClr>
-                </a:solidFill>
-                <a:effectLst/>
-                <a:uLnTx/>
-                <a:uFillTx/>
-                <a:latin typeface="Arial MT"/>
-                <a:cs typeface="Arial MT"/>
-              </a:rPr>
-              <a:t> </a:t>
-            </a:r>
-            <a:r>
-              <a:rPr kumimoji="0" sz="1500" b="0" i="0" u="none" strike="noStrike" kern="0" cap="none" spc="0" normalizeH="0" baseline="0" noProof="0" dirty="0">
-                <a:ln>
-                  <a:noFill/>
-                </a:ln>
-                <a:solidFill>
-                  <a:schemeClr val="bg1">
-                    <a:lumMod val="65000"/>
-                  </a:schemeClr>
-                </a:solidFill>
-                <a:effectLst/>
-                <a:uLnTx/>
-                <a:uFillTx/>
-                <a:latin typeface="Arial MT"/>
-                <a:cs typeface="Arial MT"/>
-              </a:rPr>
-              <a:t>Order</a:t>
-            </a:r>
-            <a:r>
-              <a:rPr kumimoji="0" sz="1500" b="0" i="0" u="none" strike="noStrike" kern="0" cap="none" spc="-35" normalizeH="0" baseline="0" noProof="0" dirty="0">
-                <a:ln>
-                  <a:noFill/>
-                </a:ln>
-                <a:solidFill>
-                  <a:schemeClr val="bg1">
-                    <a:lumMod val="65000"/>
-                  </a:schemeClr>
-                </a:solidFill>
-                <a:effectLst/>
-                <a:uLnTx/>
-                <a:uFillTx/>
-                <a:latin typeface="Arial MT"/>
-                <a:cs typeface="Arial MT"/>
-              </a:rPr>
-              <a:t> </a:t>
-            </a:r>
-            <a:r>
-              <a:rPr kumimoji="0" sz="1500" b="0" i="0" u="none" strike="noStrike" kern="0" cap="none" spc="0" normalizeH="0" baseline="0" noProof="0" dirty="0">
-                <a:ln>
-                  <a:noFill/>
-                </a:ln>
-                <a:solidFill>
-                  <a:schemeClr val="bg1">
-                    <a:lumMod val="65000"/>
-                  </a:schemeClr>
-                </a:solidFill>
-                <a:effectLst/>
-                <a:uLnTx/>
-                <a:uFillTx/>
-                <a:latin typeface="Arial MT"/>
-                <a:cs typeface="Arial MT"/>
-              </a:rPr>
-              <a:t>to</a:t>
-            </a:r>
-            <a:r>
-              <a:rPr kumimoji="0" sz="1500" b="0" i="0" u="none" strike="noStrike" kern="0" cap="none" spc="-35" normalizeH="0" baseline="0" noProof="0" dirty="0">
-                <a:ln>
-                  <a:noFill/>
-                </a:ln>
-                <a:solidFill>
-                  <a:schemeClr val="bg1">
-                    <a:lumMod val="65000"/>
-                  </a:schemeClr>
-                </a:solidFill>
-                <a:effectLst/>
-                <a:uLnTx/>
-                <a:uFillTx/>
-                <a:latin typeface="Arial MT"/>
-                <a:cs typeface="Arial MT"/>
-              </a:rPr>
-              <a:t> </a:t>
-            </a:r>
-            <a:r>
-              <a:rPr kumimoji="0" sz="1500" b="0" i="0" u="none" strike="noStrike" kern="0" cap="none" spc="0" normalizeH="0" baseline="0" noProof="0" dirty="0">
-                <a:ln>
-                  <a:noFill/>
-                </a:ln>
-                <a:solidFill>
-                  <a:schemeClr val="bg1">
-                    <a:lumMod val="65000"/>
-                  </a:schemeClr>
-                </a:solidFill>
-                <a:effectLst/>
-                <a:uLnTx/>
-                <a:uFillTx/>
-                <a:latin typeface="Arial MT"/>
-                <a:cs typeface="Arial MT"/>
-              </a:rPr>
-              <a:t>Network</a:t>
-            </a:r>
-            <a:r>
-              <a:rPr kumimoji="0" sz="1500" b="0" i="0" u="none" strike="noStrike" kern="0" cap="none" spc="-35" normalizeH="0" baseline="0" noProof="0" dirty="0">
-                <a:ln>
-                  <a:noFill/>
-                </a:ln>
-                <a:solidFill>
-                  <a:schemeClr val="bg1">
-                    <a:lumMod val="65000"/>
-                  </a:schemeClr>
-                </a:solidFill>
-                <a:effectLst/>
-                <a:uLnTx/>
-                <a:uFillTx/>
-                <a:latin typeface="Arial MT"/>
-                <a:cs typeface="Arial MT"/>
-              </a:rPr>
-              <a:t> </a:t>
-            </a:r>
-            <a:r>
-              <a:rPr kumimoji="0" sz="1500" b="0" i="0" u="none" strike="noStrike" kern="0" cap="none" spc="0" normalizeH="0" baseline="0" noProof="0" dirty="0">
-                <a:ln>
-                  <a:noFill/>
-                </a:ln>
-                <a:solidFill>
-                  <a:schemeClr val="bg1">
-                    <a:lumMod val="65000"/>
-                  </a:schemeClr>
-                </a:solidFill>
-                <a:effectLst/>
-                <a:uLnTx/>
-                <a:uFillTx/>
-                <a:latin typeface="Arial MT"/>
-                <a:cs typeface="Arial MT"/>
-              </a:rPr>
-              <a:t>Byte</a:t>
-            </a:r>
-            <a:r>
-              <a:rPr kumimoji="0" sz="1500" b="0" i="0" u="none" strike="noStrike" kern="0" cap="none" spc="-35" normalizeH="0" baseline="0" noProof="0" dirty="0">
-                <a:ln>
-                  <a:noFill/>
-                </a:ln>
-                <a:solidFill>
-                  <a:schemeClr val="bg1">
-                    <a:lumMod val="65000"/>
-                  </a:schemeClr>
-                </a:solidFill>
-                <a:effectLst/>
-                <a:uLnTx/>
-                <a:uFillTx/>
-                <a:latin typeface="Arial MT"/>
-                <a:cs typeface="Arial MT"/>
-              </a:rPr>
-              <a:t> </a:t>
-            </a:r>
-            <a:r>
-              <a:rPr kumimoji="0" sz="1500" b="0" i="0" u="none" strike="noStrike" kern="0" cap="none" spc="0" normalizeH="0" baseline="0" noProof="0" dirty="0">
-                <a:ln>
-                  <a:noFill/>
-                </a:ln>
-                <a:solidFill>
-                  <a:schemeClr val="bg1">
-                    <a:lumMod val="65000"/>
-                  </a:schemeClr>
-                </a:solidFill>
-                <a:effectLst/>
-                <a:uLnTx/>
-                <a:uFillTx/>
-                <a:latin typeface="Arial MT"/>
-                <a:cs typeface="Arial MT"/>
-              </a:rPr>
-              <a:t>Order</a:t>
-            </a:r>
-            <a:r>
-              <a:rPr kumimoji="0" sz="1500" b="0" i="0" u="none" strike="noStrike" kern="0" cap="none" spc="-35" normalizeH="0" baseline="0" noProof="0" dirty="0">
-                <a:ln>
-                  <a:noFill/>
-                </a:ln>
-                <a:solidFill>
-                  <a:schemeClr val="bg1">
-                    <a:lumMod val="65000"/>
-                  </a:schemeClr>
-                </a:solidFill>
-                <a:effectLst/>
-                <a:uLnTx/>
-                <a:uFillTx/>
-                <a:latin typeface="Arial MT"/>
-                <a:cs typeface="Arial MT"/>
-              </a:rPr>
-              <a:t> </a:t>
-            </a:r>
-            <a:r>
-              <a:rPr kumimoji="0" sz="1500" b="0" i="0" u="none" strike="noStrike" kern="0" cap="none" spc="-10" normalizeH="0" baseline="0" noProof="0" dirty="0">
-                <a:ln>
-                  <a:noFill/>
-                </a:ln>
-                <a:solidFill>
-                  <a:schemeClr val="bg1">
-                    <a:lumMod val="65000"/>
-                  </a:schemeClr>
-                </a:solidFill>
-                <a:effectLst/>
-                <a:uLnTx/>
-                <a:uFillTx/>
-                <a:latin typeface="Arial MT"/>
-                <a:cs typeface="Arial MT"/>
-              </a:rPr>
-              <a:t>Conversion</a:t>
-            </a:r>
-            <a:endParaRPr kumimoji="0" sz="1500" b="0" i="0" u="none" strike="noStrike" kern="0" cap="none" spc="0" normalizeH="0" baseline="0" noProof="0" dirty="0">
-              <a:ln>
-                <a:noFill/>
-              </a:ln>
-              <a:solidFill>
-                <a:schemeClr val="bg1">
-                  <a:lumMod val="65000"/>
-                </a:schemeClr>
               </a:solidFill>
               <a:effectLst/>
               <a:uLnTx/>
